--- a/contenido/carruseles/04-danibox/editable-canva.pptx
+++ b/contenido/carruseles/04-danibox/editable-canva.pptx
@@ -3153,8 +3153,8 @@
         </p:nvSpPr>
         <p:spPr>
           <a:xfrm>
-            <a:off x="838200" y="7783907"/>
-            <a:ext cx="4553247" cy="315468"/>
+            <a:off x="838200" y="7336976"/>
+            <a:ext cx="4837211" cy="315468"/>
           </a:xfrm>
           <a:prstGeom prst="rect">
             <a:avLst/>
@@ -3197,8 +3197,8 @@
         </p:nvSpPr>
         <p:spPr>
           <a:xfrm>
-            <a:off x="838200" y="4446686"/>
-            <a:ext cx="9182100" cy="3651051"/>
+            <a:off x="838200" y="4893468"/>
+            <a:ext cx="9182100" cy="2757338"/>
           </a:xfrm>
           <a:prstGeom prst="rect">
             <a:avLst/>
@@ -3223,7 +3223,7 @@
                 </a:solidFill>
                 <a:latin typeface="Bricolage Grotesque"/>
               </a:rPr>
-              <a:t xml:space="preserve">En un gimnasio</a:t>
+              <a:t xml:space="preserve">Dani se sabe</a:t>
             </a:r>
           </a:p>
           <a:p>
@@ -3239,7 +3239,7 @@
                 </a:solidFill>
                 <a:latin typeface="Bricolage Grotesque"/>
               </a:rPr>
-              <a:t xml:space="preserve">siempre preguntan</a:t>
+              <a:t xml:space="preserve">el nombre de</a:t>
             </a:r>
           </a:p>
           <a:p>
@@ -3255,15 +3255,8 @@
                 </a:solidFill>
                 <a:latin typeface="Bricolage Grotesque"/>
               </a:rPr>
-              <a:t xml:space="preserve">lo mismo:</a:t>
-            </a:r>
-          </a:p>
-          <a:p>
-            <a:pPr algn="l">
-              <a:lnSpc>
-                <a:spcPts val="7038"/>
-              </a:lnSpc>
-            </a:pPr>
+              <a:t xml:space="preserve">cada alumno</a:t>
+            </a:r>
             <a:r>
               <a:rPr sz="6900" b="1" spc="-206">
                 <a:solidFill>
@@ -3271,7 +3264,7 @@
                 </a:solidFill>
                 <a:latin typeface="Bricolage Grotesque"/>
               </a:rPr>
-              <a:t xml:space="preserve">¿a qué hora?</a:t>
+              <a:t xml:space="preserve">.</a:t>
             </a:r>
           </a:p>
         </p:txBody>

--- a/contenido/carruseles/04-danibox/editable-canva.pptx
+++ b/contenido/carruseles/04-danibox/editable-canva.pptx
@@ -3153,8 +3153,8 @@
         </p:nvSpPr>
         <p:spPr>
           <a:xfrm>
-            <a:off x="838200" y="7336976"/>
-            <a:ext cx="4837211" cy="315468"/>
+            <a:off x="2678459" y="7336976"/>
+            <a:ext cx="4648795" cy="315468"/>
           </a:xfrm>
           <a:prstGeom prst="rect">
             <a:avLst/>
@@ -3223,7 +3223,7 @@
                 </a:solidFill>
                 <a:latin typeface="Bricolage Grotesque"/>
               </a:rPr>
-              <a:t xml:space="preserve">Dani se sabe</a:t>
+              <a:t xml:space="preserve">Hace 26 años</a:t>
             </a:r>
           </a:p>
           <a:p>
@@ -3239,7 +3239,7 @@
                 </a:solidFill>
                 <a:latin typeface="Bricolage Grotesque"/>
               </a:rPr>
-              <a:t xml:space="preserve">el nombre de</a:t>
+              <a:t xml:space="preserve">que Dani enseña</a:t>
             </a:r>
           </a:p>
           <a:p>
@@ -3255,7 +3255,16 @@
                 </a:solidFill>
                 <a:latin typeface="Bricolage Grotesque"/>
               </a:rPr>
-              <a:t xml:space="preserve">cada alumno</a:t>
+              <a:t xml:space="preserve">en el </a:t>
+            </a:r>
+            <a:r>
+              <a:rPr sz="6900" b="1" spc="-206">
+                <a:solidFill>
+                  <a:srgbClr val="0A1B33"/>
+                </a:solidFill>
+                <a:latin typeface="Bricolage Grotesque"/>
+              </a:rPr>
+              <a:t xml:space="preserve">mismo lugar</a:t>
             </a:r>
             <a:r>
               <a:rPr sz="6900" b="1" spc="-206">

--- a/contenido/carruseles/04-danibox/editable-canva.pptx
+++ b/contenido/carruseles/04-danibox/editable-canva.pptx
@@ -3477,6 +3477,30 @@
         </p:blipFill>
         <p:spPr>
           <a:xfrm>
+            <a:off x="6019800" y="2909887"/>
+            <a:ext cx="3429000" cy="6858000"/>
+          </a:xfrm>
+          <a:prstGeom prst="rect">
+            <a:avLst/>
+          </a:prstGeom>
+        </p:spPr>
+      </p:pic>
+      <p:pic>
+        <p:nvPicPr>
+          <p:cNvPr id="5" name="Picture 4" descr="image.png"/>
+          <p:cNvPicPr>
+            <a:picLocks noChangeAspect="1"/>
+          </p:cNvPicPr>
+          <p:nvPr/>
+        </p:nvPicPr>
+        <p:blipFill>
+          <a:blip r:embed="rId3"/>
+          <a:stretch>
+            <a:fillRect/>
+          </a:stretch>
+        </p:blipFill>
+        <p:spPr>
+          <a:xfrm>
             <a:off x="838200" y="11582400"/>
             <a:ext cx="438150" cy="438150"/>
           </a:xfrm>
@@ -3487,7 +3511,7 @@
       </p:pic>
       <p:sp>
         <p:nvSpPr>
-          <p:cNvPr id="5" name="TextBox 4"/>
+          <p:cNvPr id="6" name="TextBox 5"/>
           <p:cNvSpPr txBox="1"/>
           <p:nvPr/>
         </p:nvSpPr>

--- a/contenido/carruseles/04-danibox/editable-canva.pptx
+++ b/contenido/carruseles/04-danibox/editable-canva.pptx
@@ -3153,8 +3153,8 @@
         </p:nvSpPr>
         <p:spPr>
           <a:xfrm>
-            <a:off x="2678459" y="7336976"/>
-            <a:ext cx="4648795" cy="315468"/>
+            <a:off x="838200" y="6890194"/>
+            <a:ext cx="4572595" cy="315468"/>
           </a:xfrm>
           <a:prstGeom prst="rect">
             <a:avLst/>
@@ -3191,14 +3191,58 @@
       </p:sp>
       <p:sp>
         <p:nvSpPr>
-          <p:cNvPr id="4" name="TextBox 3"/>
+          <p:cNvPr id="4" name="Rectangle 3"/>
+          <p:cNvSpPr/>
+          <p:nvPr/>
+        </p:nvSpPr>
+        <p:spPr>
+          <a:xfrm>
+            <a:off x="838200" y="7783907"/>
+            <a:ext cx="2464147" cy="315468"/>
+          </a:xfrm>
+          <a:prstGeom prst="rect">
+            <a:avLst/>
+          </a:prstGeom>
+          <a:solidFill>
+            <a:srgbClr val="A8E1F8"/>
+          </a:solidFill>
+          <a:ln>
+            <a:noFill/>
+          </a:ln>
+          <a:effectLst/>
+        </p:spPr>
+        <p:style>
+          <a:lnRef idx="1">
+            <a:schemeClr val="accent1"/>
+          </a:lnRef>
+          <a:fillRef idx="3">
+            <a:schemeClr val="accent1"/>
+          </a:fillRef>
+          <a:effectRef idx="2">
+            <a:schemeClr val="accent1"/>
+          </a:effectRef>
+          <a:fontRef idx="minor">
+            <a:schemeClr val="lt1"/>
+          </a:fontRef>
+        </p:style>
+        <p:txBody>
+          <a:bodyPr rtlCol="0" anchor="ctr"/>
+          <a:lstStyle/>
+          <a:p>
+            <a:pPr algn="ctr"/>
+          </a:p>
+        </p:txBody>
+      </p:sp>
+      <p:sp>
+        <p:nvSpPr>
+          <p:cNvPr id="5" name="TextBox 4"/>
           <p:cNvSpPr txBox="1"/>
           <p:nvPr/>
         </p:nvSpPr>
         <p:spPr>
           <a:xfrm>
-            <a:off x="838200" y="4893468"/>
-            <a:ext cx="9182100" cy="2757338"/>
+            <a:off x="838200" y="4446686"/>
+            <a:ext cx="9182100" cy="3651051"/>
           </a:xfrm>
           <a:prstGeom prst="rect">
             <a:avLst/>
@@ -3223,7 +3267,7 @@
                 </a:solidFill>
                 <a:latin typeface="Bricolage Grotesque"/>
               </a:rPr>
-              <a:t xml:space="preserve">Hace 26 años</a:t>
+              <a:t xml:space="preserve">Acá se aprende</a:t>
             </a:r>
           </a:p>
           <a:p>
@@ -3239,7 +3283,7 @@
                 </a:solidFill>
                 <a:latin typeface="Bricolage Grotesque"/>
               </a:rPr>
-              <a:t xml:space="preserve">que Dani enseña</a:t>
+              <a:t xml:space="preserve">a boxear y a</a:t>
             </a:r>
           </a:p>
           <a:p>
@@ -3255,8 +3299,15 @@
                 </a:solidFill>
                 <a:latin typeface="Bricolage Grotesque"/>
               </a:rPr>
-              <a:t xml:space="preserve">en el </a:t>
-            </a:r>
+              <a:t xml:space="preserve">bancar al de</a:t>
+            </a:r>
+          </a:p>
+          <a:p>
+            <a:pPr algn="l">
+              <a:lnSpc>
+                <a:spcPts val="7038"/>
+              </a:lnSpc>
+            </a:pPr>
             <a:r>
               <a:rPr sz="6900" b="1" spc="-206">
                 <a:solidFill>
@@ -3264,7 +3315,7 @@
                 </a:solidFill>
                 <a:latin typeface="Bricolage Grotesque"/>
               </a:rPr>
-              <a:t xml:space="preserve">mismo lugar</a:t>
+              <a:t xml:space="preserve">al lado</a:t>
             </a:r>
             <a:r>
               <a:rPr sz="6900" b="1" spc="-206">
@@ -3280,7 +3331,7 @@
       </p:sp>
       <p:pic>
         <p:nvPicPr>
-          <p:cNvPr id="5" name="Picture 4" descr="image.png"/>
+          <p:cNvPr id="6" name="Picture 5" descr="image.png"/>
           <p:cNvPicPr>
             <a:picLocks noChangeAspect="1"/>
           </p:cNvPicPr>
@@ -3304,7 +3355,7 @@
       </p:pic>
       <p:sp>
         <p:nvSpPr>
-          <p:cNvPr id="6" name="TextBox 5"/>
+          <p:cNvPr id="7" name="TextBox 6"/>
           <p:cNvSpPr txBox="1"/>
           <p:nvPr/>
         </p:nvSpPr>

--- a/contenido/carruseles/04-danibox/editable-canva.pptx
+++ b/contenido/carruseles/04-danibox/editable-canva.pptx
@@ -3153,14 +3153,14 @@
         </p:nvSpPr>
         <p:spPr>
           <a:xfrm>
-            <a:off x="838200" y="6890194"/>
-            <a:ext cx="4572595" cy="315468"/>
+            <a:off x="2678459" y="7336976"/>
+            <a:ext cx="4648795" cy="315468"/>
           </a:xfrm>
           <a:prstGeom prst="rect">
             <a:avLst/>
           </a:prstGeom>
           <a:solidFill>
-            <a:srgbClr val="A8E1F8"/>
+            <a:srgbClr val="73CFF2"/>
           </a:solidFill>
           <a:ln>
             <a:noFill/>
@@ -3191,58 +3191,14 @@
       </p:sp>
       <p:sp>
         <p:nvSpPr>
-          <p:cNvPr id="4" name="Rectangle 3"/>
-          <p:cNvSpPr/>
+          <p:cNvPr id="4" name="TextBox 3"/>
+          <p:cNvSpPr txBox="1"/>
           <p:nvPr/>
         </p:nvSpPr>
         <p:spPr>
           <a:xfrm>
-            <a:off x="838200" y="7783907"/>
-            <a:ext cx="2464147" cy="315468"/>
-          </a:xfrm>
-          <a:prstGeom prst="rect">
-            <a:avLst/>
-          </a:prstGeom>
-          <a:solidFill>
-            <a:srgbClr val="A8E1F8"/>
-          </a:solidFill>
-          <a:ln>
-            <a:noFill/>
-          </a:ln>
-          <a:effectLst/>
-        </p:spPr>
-        <p:style>
-          <a:lnRef idx="1">
-            <a:schemeClr val="accent1"/>
-          </a:lnRef>
-          <a:fillRef idx="3">
-            <a:schemeClr val="accent1"/>
-          </a:fillRef>
-          <a:effectRef idx="2">
-            <a:schemeClr val="accent1"/>
-          </a:effectRef>
-          <a:fontRef idx="minor">
-            <a:schemeClr val="lt1"/>
-          </a:fontRef>
-        </p:style>
-        <p:txBody>
-          <a:bodyPr rtlCol="0" anchor="ctr"/>
-          <a:lstStyle/>
-          <a:p>
-            <a:pPr algn="ctr"/>
-          </a:p>
-        </p:txBody>
-      </p:sp>
-      <p:sp>
-        <p:nvSpPr>
-          <p:cNvPr id="5" name="TextBox 4"/>
-          <p:cNvSpPr txBox="1"/>
-          <p:nvPr/>
-        </p:nvSpPr>
-        <p:spPr>
-          <a:xfrm>
-            <a:off x="838200" y="4446686"/>
-            <a:ext cx="9182100" cy="3651051"/>
+            <a:off x="838200" y="4893468"/>
+            <a:ext cx="9182100" cy="2757338"/>
           </a:xfrm>
           <a:prstGeom prst="rect">
             <a:avLst/>
@@ -3263,11 +3219,11 @@
             <a:r>
               <a:rPr sz="6900" b="1" spc="-206">
                 <a:solidFill>
-                  <a:srgbClr val="0A1B33"/>
+                  <a:srgbClr val="FFFFFF"/>
                 </a:solidFill>
                 <a:latin typeface="Bricolage Grotesque"/>
               </a:rPr>
-              <a:t xml:space="preserve">Acá se aprende</a:t>
+              <a:t xml:space="preserve">Hace 25 años</a:t>
             </a:r>
           </a:p>
           <a:p>
@@ -3279,11 +3235,11 @@
             <a:r>
               <a:rPr sz="6900" b="1" spc="-206">
                 <a:solidFill>
-                  <a:srgbClr val="0A1B33"/>
+                  <a:srgbClr val="FFFFFF"/>
                 </a:solidFill>
                 <a:latin typeface="Bricolage Grotesque"/>
               </a:rPr>
-              <a:t xml:space="preserve">a boxear y a</a:t>
+              <a:t xml:space="preserve">que Dani enseña</a:t>
             </a:r>
           </a:p>
           <a:p>
@@ -3295,32 +3251,25 @@
             <a:r>
               <a:rPr sz="6900" b="1" spc="-206">
                 <a:solidFill>
-                  <a:srgbClr val="0A1B33"/>
+                  <a:srgbClr val="FFFFFF"/>
                 </a:solidFill>
                 <a:latin typeface="Bricolage Grotesque"/>
               </a:rPr>
-              <a:t xml:space="preserve">bancar al de</a:t>
-            </a:r>
-          </a:p>
-          <a:p>
-            <a:pPr algn="l">
-              <a:lnSpc>
-                <a:spcPts val="7038"/>
-              </a:lnSpc>
-            </a:pPr>
+              <a:t xml:space="preserve">en el </a:t>
+            </a:r>
             <a:r>
               <a:rPr sz="6900" b="1" spc="-206">
                 <a:solidFill>
-                  <a:srgbClr val="0A1B33"/>
+                  <a:srgbClr val="FFFFFF"/>
                 </a:solidFill>
                 <a:latin typeface="Bricolage Grotesque"/>
               </a:rPr>
-              <a:t xml:space="preserve">al lado</a:t>
+              <a:t xml:space="preserve">mismo lugar</a:t>
             </a:r>
             <a:r>
               <a:rPr sz="6900" b="1" spc="-206">
                 <a:solidFill>
-                  <a:srgbClr val="0A1B33"/>
+                  <a:srgbClr val="FFFFFF"/>
                 </a:solidFill>
                 <a:latin typeface="Bricolage Grotesque"/>
               </a:rPr>
@@ -3331,7 +3280,7 @@
       </p:sp>
       <p:pic>
         <p:nvPicPr>
-          <p:cNvPr id="6" name="Picture 5" descr="image.png"/>
+          <p:cNvPr id="5" name="Picture 4" descr="image.png"/>
           <p:cNvPicPr>
             <a:picLocks noChangeAspect="1"/>
           </p:cNvPicPr>
@@ -3355,7 +3304,7 @@
       </p:pic>
       <p:sp>
         <p:nvSpPr>
-          <p:cNvPr id="7" name="TextBox 6"/>
+          <p:cNvPr id="6" name="TextBox 5"/>
           <p:cNvSpPr txBox="1"/>
           <p:nvPr/>
         </p:nvSpPr>
@@ -3383,7 +3332,7 @@
             <a:r>
               <a:rPr sz="1800" b="1" spc="252">
                 <a:solidFill>
-                  <a:srgbClr val="1657D0"/>
+                  <a:srgbClr val="8FD8F5"/>
                 </a:solidFill>
                 <a:latin typeface="Figtree"/>
               </a:rPr>
@@ -3392,7 +3341,7 @@
             <a:r>
               <a:rPr sz="1800" b="1" spc="252">
                 <a:solidFill>
-                  <a:srgbClr val="1657D0"/>
+                  <a:srgbClr val="8FD8F5"/>
                 </a:solidFill>
                 <a:latin typeface="Figtree"/>
               </a:rPr>

--- a/contenido/carruseles/04-danibox/editable-canva.pptx
+++ b/contenido/carruseles/04-danibox/editable-canva.pptx
@@ -3099,9 +3099,33 @@
         <p:nvPr/>
       </p:nvGrpSpPr>
       <p:grpSpPr/>
-      <p:sp>
-        <p:nvSpPr>
-          <p:cNvPr id="2" name="Rounded Rectangle 1"/>
+      <p:pic>
+        <p:nvPicPr>
+          <p:cNvPr id="2" name="Picture 1" descr="image.png"/>
+          <p:cNvPicPr>
+            <a:picLocks noChangeAspect="1"/>
+          </p:cNvPicPr>
+          <p:nvPr/>
+        </p:nvPicPr>
+        <p:blipFill>
+          <a:blip r:embed="rId2"/>
+          <a:stretch>
+            <a:fillRect/>
+          </a:stretch>
+        </p:blipFill>
+        <p:spPr>
+          <a:xfrm>
+            <a:off x="-838200" y="-838200"/>
+            <a:ext cx="11963400" cy="14535150"/>
+          </a:xfrm>
+          <a:prstGeom prst="rect">
+            <a:avLst/>
+          </a:prstGeom>
+        </p:spPr>
+      </p:pic>
+      <p:sp>
+        <p:nvSpPr>
+          <p:cNvPr id="3" name="Rounded Rectangle 2"/>
           <p:cNvSpPr/>
           <p:nvPr/>
         </p:nvSpPr>
@@ -3147,7 +3171,7 @@
       </p:sp>
       <p:sp>
         <p:nvSpPr>
-          <p:cNvPr id="3" name="Rectangle 2"/>
+          <p:cNvPr id="4" name="Rectangle 3"/>
           <p:cNvSpPr/>
           <p:nvPr/>
         </p:nvSpPr>
@@ -3191,7 +3215,7 @@
       </p:sp>
       <p:sp>
         <p:nvSpPr>
-          <p:cNvPr id="4" name="TextBox 3"/>
+          <p:cNvPr id="5" name="TextBox 4"/>
           <p:cNvSpPr txBox="1"/>
           <p:nvPr/>
         </p:nvSpPr>
@@ -3280,14 +3304,14 @@
       </p:sp>
       <p:pic>
         <p:nvPicPr>
-          <p:cNvPr id="5" name="Picture 4" descr="image.png"/>
+          <p:cNvPr id="6" name="Picture 5" descr="image.png"/>
           <p:cNvPicPr>
             <a:picLocks noChangeAspect="1"/>
           </p:cNvPicPr>
           <p:nvPr/>
         </p:nvPicPr>
         <p:blipFill>
-          <a:blip r:embed="rId2"/>
+          <a:blip r:embed="rId3"/>
           <a:stretch>
             <a:fillRect/>
           </a:stretch>
@@ -3304,7 +3328,7 @@
       </p:pic>
       <p:sp>
         <p:nvSpPr>
-          <p:cNvPr id="6" name="TextBox 5"/>
+          <p:cNvPr id="7" name="TextBox 6"/>
           <p:cNvSpPr txBox="1"/>
           <p:nvPr/>
         </p:nvSpPr>
@@ -3461,9 +3485,142 @@
           </a:p>
         </p:txBody>
       </p:sp>
+      <p:sp>
+        <p:nvSpPr>
+          <p:cNvPr id="4" name="TextBox 3"/>
+          <p:cNvSpPr txBox="1"/>
+          <p:nvPr/>
+        </p:nvSpPr>
+        <p:spPr>
+          <a:xfrm>
+            <a:off x="838200" y="4267051"/>
+            <a:ext cx="5181600" cy="1796355"/>
+          </a:xfrm>
+          <a:prstGeom prst="rect">
+            <a:avLst/>
+          </a:prstGeom>
+          <a:noFill/>
+        </p:spPr>
+        <p:txBody>
+          <a:bodyPr wrap="none" lIns="0" rIns="0" tIns="0" bIns="0" anchor="t">
+            <a:noAutofit/>
+          </a:bodyPr>
+          <a:lstStyle/>
+          <a:p>
+            <a:pPr algn="l">
+              <a:lnSpc>
+                <a:spcPts val="13544"/>
+              </a:lnSpc>
+            </a:pPr>
+            <a:r>
+              <a:rPr sz="15750" b="1" spc="-787">
+                <a:solidFill>
+                  <a:srgbClr val="63C8F2"/>
+                </a:solidFill>
+                <a:latin typeface="Bricolage Grotesque"/>
+              </a:rPr>
+              <a:t xml:space="preserve">4,4</a:t>
+            </a:r>
+          </a:p>
+        </p:txBody>
+      </p:sp>
+      <p:sp>
+        <p:nvSpPr>
+          <p:cNvPr id="5" name="TextBox 4"/>
+          <p:cNvSpPr txBox="1"/>
+          <p:nvPr/>
+        </p:nvSpPr>
+        <p:spPr>
+          <a:xfrm>
+            <a:off x="838200" y="6234856"/>
+            <a:ext cx="5181600" cy="981372"/>
+          </a:xfrm>
+          <a:prstGeom prst="rect">
+            <a:avLst/>
+          </a:prstGeom>
+          <a:noFill/>
+        </p:spPr>
+        <p:txBody>
+          <a:bodyPr wrap="none" lIns="0" rIns="0" tIns="0" bIns="0" anchor="t">
+            <a:noAutofit/>
+          </a:bodyPr>
+          <a:lstStyle/>
+          <a:p>
+            <a:pPr algn="l">
+              <a:lnSpc>
+                <a:spcPts val="3564"/>
+              </a:lnSpc>
+            </a:pPr>
+            <a:r>
+              <a:rPr sz="3300" b="1" spc="-66">
+                <a:solidFill>
+                  <a:srgbClr val="FFFFFF"/>
+                </a:solidFill>
+                <a:latin typeface="Bricolage Grotesque"/>
+              </a:rPr>
+              <a:t xml:space="preserve">de puntaje</a:t>
+            </a:r>
+          </a:p>
+          <a:p>
+            <a:pPr algn="l">
+              <a:lnSpc>
+                <a:spcPts val="3564"/>
+              </a:lnSpc>
+            </a:pPr>
+            <a:r>
+              <a:rPr sz="3300" b="1" spc="-66">
+                <a:solidFill>
+                  <a:srgbClr val="FFFFFF"/>
+                </a:solidFill>
+                <a:latin typeface="Bricolage Grotesque"/>
+              </a:rPr>
+              <a:t xml:space="preserve">en Google.</a:t>
+            </a:r>
+          </a:p>
+        </p:txBody>
+      </p:sp>
+      <p:sp>
+        <p:nvSpPr>
+          <p:cNvPr id="6" name="TextBox 5"/>
+          <p:cNvSpPr txBox="1"/>
+          <p:nvPr/>
+        </p:nvSpPr>
+        <p:spPr>
+          <a:xfrm>
+            <a:off x="838200" y="7330529"/>
+            <a:ext cx="4667250" cy="1156245"/>
+          </a:xfrm>
+          <a:prstGeom prst="rect">
+            <a:avLst/>
+          </a:prstGeom>
+          <a:noFill/>
+        </p:spPr>
+        <p:txBody>
+          <a:bodyPr wrap="square" lIns="0" rIns="0" tIns="0" bIns="0" anchor="t">
+            <a:noAutofit/>
+          </a:bodyPr>
+          <a:lstStyle/>
+          <a:p>
+            <a:pPr algn="l">
+              <a:lnSpc>
+                <a:spcPts val="2835"/>
+              </a:lnSpc>
+            </a:pPr>
+            <a:r>
+              <a:rPr sz="2025" b="0">
+                <a:solidFill>
+                  <a:srgbClr val="B9CFE8"/>
+                </a:solidFill>
+                <a:latin typeface="Figtree"/>
+              </a:rPr>
+              <a:t xml:space="preserve">Las opiniones de los alumnos van en la web copiadas tal cual, con nombre y con el lugar donde las escribieron.</a:t>
+            </a:r>
+          </a:p>
+        </p:txBody>
+      </p:sp>
       <p:pic>
         <p:nvPicPr>
-          <p:cNvPr id="4" name="Picture 3" descr="image.png"/>
+          <p:cNvPr id="7" name="Picture 6" descr="image.png"/>
           <p:cNvPicPr>
             <a:picLocks noChangeAspect="1"/>
           </p:cNvPicPr>
@@ -3487,7 +3644,7 @@
       </p:pic>
       <p:pic>
         <p:nvPicPr>
-          <p:cNvPr id="5" name="Picture 4" descr="image.png"/>
+          <p:cNvPr id="8" name="Picture 7" descr="image.png"/>
           <p:cNvPicPr>
             <a:picLocks noChangeAspect="1"/>
           </p:cNvPicPr>
@@ -3511,7 +3668,7 @@
       </p:pic>
       <p:sp>
         <p:nvSpPr>
-          <p:cNvPr id="6" name="TextBox 5"/>
+          <p:cNvPr id="9" name="TextBox 8"/>
           <p:cNvSpPr txBox="1"/>
           <p:nvPr/>
         </p:nvSpPr>
@@ -3668,9 +3825,381 @@
           </a:p>
         </p:txBody>
       </p:sp>
+      <p:sp>
+        <p:nvSpPr>
+          <p:cNvPr id="4" name="Rounded Rectangle 3"/>
+          <p:cNvSpPr/>
+          <p:nvPr/>
+        </p:nvSpPr>
+        <p:spPr>
+          <a:xfrm>
+            <a:off x="5638800" y="3150840"/>
+            <a:ext cx="495300" cy="38100"/>
+          </a:xfrm>
+          <a:prstGeom prst="roundRect">
+            <a:avLst>
+              <a:gd name="adj" fmla="val 50000"/>
+            </a:avLst>
+          </a:prstGeom>
+          <a:solidFill>
+            <a:srgbClr val="00A8E8"/>
+          </a:solidFill>
+          <a:ln>
+            <a:noFill/>
+          </a:ln>
+          <a:effectLst/>
+        </p:spPr>
+        <p:style>
+          <a:lnRef idx="1">
+            <a:schemeClr val="accent1"/>
+          </a:lnRef>
+          <a:fillRef idx="3">
+            <a:schemeClr val="accent1"/>
+          </a:fillRef>
+          <a:effectRef idx="2">
+            <a:schemeClr val="accent1"/>
+          </a:effectRef>
+          <a:fontRef idx="minor">
+            <a:schemeClr val="lt1"/>
+          </a:fontRef>
+        </p:style>
+        <p:txBody>
+          <a:bodyPr rtlCol="0" anchor="ctr"/>
+          <a:lstStyle/>
+          <a:p>
+            <a:pPr algn="ctr"/>
+          </a:p>
+        </p:txBody>
+      </p:sp>
+      <p:sp>
+        <p:nvSpPr>
+          <p:cNvPr id="5" name="Rounded Rectangle 4"/>
+          <p:cNvSpPr/>
+          <p:nvPr/>
+        </p:nvSpPr>
+        <p:spPr>
+          <a:xfrm>
+            <a:off x="5638800" y="5476279"/>
+            <a:ext cx="495300" cy="38100"/>
+          </a:xfrm>
+          <a:prstGeom prst="roundRect">
+            <a:avLst>
+              <a:gd name="adj" fmla="val 50000"/>
+            </a:avLst>
+          </a:prstGeom>
+          <a:solidFill>
+            <a:srgbClr val="00A8E8"/>
+          </a:solidFill>
+          <a:ln>
+            <a:noFill/>
+          </a:ln>
+          <a:effectLst/>
+        </p:spPr>
+        <p:style>
+          <a:lnRef idx="1">
+            <a:schemeClr val="accent1"/>
+          </a:lnRef>
+          <a:fillRef idx="3">
+            <a:schemeClr val="accent1"/>
+          </a:fillRef>
+          <a:effectRef idx="2">
+            <a:schemeClr val="accent1"/>
+          </a:effectRef>
+          <a:fontRef idx="minor">
+            <a:schemeClr val="lt1"/>
+          </a:fontRef>
+        </p:style>
+        <p:txBody>
+          <a:bodyPr rtlCol="0" anchor="ctr"/>
+          <a:lstStyle/>
+          <a:p>
+            <a:pPr algn="ctr"/>
+          </a:p>
+        </p:txBody>
+      </p:sp>
+      <p:sp>
+        <p:nvSpPr>
+          <p:cNvPr id="6" name="Rounded Rectangle 5"/>
+          <p:cNvSpPr/>
+          <p:nvPr/>
+        </p:nvSpPr>
+        <p:spPr>
+          <a:xfrm>
+            <a:off x="5638800" y="8125717"/>
+            <a:ext cx="495300" cy="38100"/>
+          </a:xfrm>
+          <a:prstGeom prst="roundRect">
+            <a:avLst>
+              <a:gd name="adj" fmla="val 50000"/>
+            </a:avLst>
+          </a:prstGeom>
+          <a:solidFill>
+            <a:srgbClr val="00A8E8"/>
+          </a:solidFill>
+          <a:ln>
+            <a:noFill/>
+          </a:ln>
+          <a:effectLst/>
+        </p:spPr>
+        <p:style>
+          <a:lnRef idx="1">
+            <a:schemeClr val="accent1"/>
+          </a:lnRef>
+          <a:fillRef idx="3">
+            <a:schemeClr val="accent1"/>
+          </a:fillRef>
+          <a:effectRef idx="2">
+            <a:schemeClr val="accent1"/>
+          </a:effectRef>
+          <a:fontRef idx="minor">
+            <a:schemeClr val="lt1"/>
+          </a:fontRef>
+        </p:style>
+        <p:txBody>
+          <a:bodyPr rtlCol="0" anchor="ctr"/>
+          <a:lstStyle/>
+          <a:p>
+            <a:pPr algn="ctr"/>
+          </a:p>
+        </p:txBody>
+      </p:sp>
+      <p:sp>
+        <p:nvSpPr>
+          <p:cNvPr id="7" name="TextBox 6"/>
+          <p:cNvSpPr txBox="1"/>
+          <p:nvPr/>
+        </p:nvSpPr>
+        <p:spPr>
+          <a:xfrm>
+            <a:off x="6324600" y="2979390"/>
+            <a:ext cx="3181350" cy="820042"/>
+          </a:xfrm>
+          <a:prstGeom prst="rect">
+            <a:avLst/>
+          </a:prstGeom>
+          <a:noFill/>
+        </p:spPr>
+        <p:txBody>
+          <a:bodyPr wrap="square" lIns="0" rIns="0" tIns="0" bIns="0" anchor="t">
+            <a:noAutofit/>
+          </a:bodyPr>
+          <a:lstStyle/>
+          <a:p>
+            <a:pPr algn="l">
+              <a:lnSpc>
+                <a:spcPts val="2929"/>
+              </a:lnSpc>
+            </a:pPr>
+            <a:r>
+              <a:rPr sz="2325" b="1">
+                <a:solidFill>
+                  <a:srgbClr val="0A1B33"/>
+                </a:solidFill>
+                <a:latin typeface="Figtree"/>
+              </a:rPr>
+              <a:t xml:space="preserve">Los 16 turnos, día por día</a:t>
+            </a:r>
+          </a:p>
+        </p:txBody>
+      </p:sp>
+      <p:sp>
+        <p:nvSpPr>
+          <p:cNvPr id="8" name="TextBox 7"/>
+          <p:cNvSpPr txBox="1"/>
+          <p:nvPr/>
+        </p:nvSpPr>
+        <p:spPr>
+          <a:xfrm>
+            <a:off x="6324600" y="5304829"/>
+            <a:ext cx="3181350" cy="820042"/>
+          </a:xfrm>
+          <a:prstGeom prst="rect">
+            <a:avLst/>
+          </a:prstGeom>
+          <a:noFill/>
+        </p:spPr>
+        <p:txBody>
+          <a:bodyPr wrap="square" lIns="0" rIns="0" tIns="0" bIns="0" anchor="t">
+            <a:noAutofit/>
+          </a:bodyPr>
+          <a:lstStyle/>
+          <a:p>
+            <a:pPr algn="l">
+              <a:lnSpc>
+                <a:spcPts val="2929"/>
+              </a:lnSpc>
+            </a:pPr>
+            <a:r>
+              <a:rPr sz="2325" b="1">
+                <a:solidFill>
+                  <a:srgbClr val="0A1B33"/>
+                </a:solidFill>
+                <a:latin typeface="Figtree"/>
+              </a:rPr>
+              <a:t xml:space="preserve">Cinco accesos a WhatsApp</a:t>
+            </a:r>
+          </a:p>
+        </p:txBody>
+      </p:sp>
+      <p:sp>
+        <p:nvSpPr>
+          <p:cNvPr id="9" name="TextBox 8"/>
+          <p:cNvSpPr txBox="1"/>
+          <p:nvPr/>
+        </p:nvSpPr>
+        <p:spPr>
+          <a:xfrm>
+            <a:off x="6324600" y="7954267"/>
+            <a:ext cx="3181350" cy="448121"/>
+          </a:xfrm>
+          <a:prstGeom prst="rect">
+            <a:avLst/>
+          </a:prstGeom>
+          <a:noFill/>
+        </p:spPr>
+        <p:txBody>
+          <a:bodyPr wrap="square" lIns="0" rIns="0" tIns="0" bIns="0" anchor="t">
+            <a:noAutofit/>
+          </a:bodyPr>
+          <a:lstStyle/>
+          <a:p>
+            <a:pPr algn="l">
+              <a:lnSpc>
+                <a:spcPts val="2929"/>
+              </a:lnSpc>
+            </a:pPr>
+            <a:r>
+              <a:rPr sz="2325" b="1">
+                <a:solidFill>
+                  <a:srgbClr val="0A1B33"/>
+                </a:solidFill>
+                <a:latin typeface="Figtree"/>
+              </a:rPr>
+              <a:t xml:space="preserve">También lo que no hay</a:t>
+            </a:r>
+          </a:p>
+        </p:txBody>
+      </p:sp>
+      <p:sp>
+        <p:nvSpPr>
+          <p:cNvPr id="10" name="TextBox 9"/>
+          <p:cNvSpPr txBox="1"/>
+          <p:nvPr/>
+        </p:nvSpPr>
+        <p:spPr>
+          <a:xfrm>
+            <a:off x="6324600" y="3799433"/>
+            <a:ext cx="3181350" cy="1048196"/>
+          </a:xfrm>
+          <a:prstGeom prst="rect">
+            <a:avLst/>
+          </a:prstGeom>
+          <a:noFill/>
+        </p:spPr>
+        <p:txBody>
+          <a:bodyPr wrap="square" lIns="0" rIns="0" tIns="0" bIns="0" anchor="t">
+            <a:noAutofit/>
+          </a:bodyPr>
+          <a:lstStyle/>
+          <a:p>
+            <a:pPr algn="l">
+              <a:lnSpc>
+                <a:spcPts val="2551"/>
+              </a:lnSpc>
+            </a:pPr>
+            <a:r>
+              <a:rPr sz="2025" b="0">
+                <a:solidFill>
+                  <a:srgbClr val="46526B"/>
+                </a:solidFill>
+                <a:latin typeface="Figtree"/>
+              </a:rPr>
+              <a:t xml:space="preserve">Con la hora de inicio y la de fin. Cada uno dura una hora y media.</a:t>
+            </a:r>
+          </a:p>
+        </p:txBody>
+      </p:sp>
+      <p:sp>
+        <p:nvSpPr>
+          <p:cNvPr id="11" name="TextBox 10"/>
+          <p:cNvSpPr txBox="1"/>
+          <p:nvPr/>
+        </p:nvSpPr>
+        <p:spPr>
+          <a:xfrm>
+            <a:off x="6324600" y="6124872"/>
+            <a:ext cx="3181350" cy="1372195"/>
+          </a:xfrm>
+          <a:prstGeom prst="rect">
+            <a:avLst/>
+          </a:prstGeom>
+          <a:noFill/>
+        </p:spPr>
+        <p:txBody>
+          <a:bodyPr wrap="square" lIns="0" rIns="0" tIns="0" bIns="0" anchor="t">
+            <a:noAutofit/>
+          </a:bodyPr>
+          <a:lstStyle/>
+          <a:p>
+            <a:pPr algn="l">
+              <a:lnSpc>
+                <a:spcPts val="2551"/>
+              </a:lnSpc>
+            </a:pPr>
+            <a:r>
+              <a:rPr sz="2025" b="0">
+                <a:solidFill>
+                  <a:srgbClr val="46526B"/>
+                </a:solidFill>
+                <a:latin typeface="Figtree"/>
+              </a:rPr>
+              <a:t xml:space="preserve">Cada uno con el mensaje ya escrito: probar una clase, elegir turno, sumarse a entrenar.</a:t>
+            </a:r>
+          </a:p>
+        </p:txBody>
+      </p:sp>
+      <p:sp>
+        <p:nvSpPr>
+          <p:cNvPr id="12" name="TextBox 11"/>
+          <p:cNvSpPr txBox="1"/>
+          <p:nvPr/>
+        </p:nvSpPr>
+        <p:spPr>
+          <a:xfrm>
+            <a:off x="6324600" y="8402389"/>
+            <a:ext cx="3181350" cy="1372195"/>
+          </a:xfrm>
+          <a:prstGeom prst="rect">
+            <a:avLst/>
+          </a:prstGeom>
+          <a:noFill/>
+        </p:spPr>
+        <p:txBody>
+          <a:bodyPr wrap="square" lIns="0" rIns="0" tIns="0" bIns="0" anchor="t">
+            <a:noAutofit/>
+          </a:bodyPr>
+          <a:lstStyle/>
+          <a:p>
+            <a:pPr algn="l">
+              <a:lnSpc>
+                <a:spcPts val="2551"/>
+              </a:lnSpc>
+            </a:pPr>
+            <a:r>
+              <a:rPr sz="2025" b="0">
+                <a:solidFill>
+                  <a:srgbClr val="46526B"/>
+                </a:solidFill>
+                <a:latin typeface="Figtree"/>
+              </a:rPr>
+              <a:t xml:space="preserve">Sábado y domingo dice “sin clases”, para que nadie llegue y encuentre todo cerrado.</a:t>
+            </a:r>
+          </a:p>
+        </p:txBody>
+      </p:sp>
       <p:pic>
         <p:nvPicPr>
-          <p:cNvPr id="4" name="Picture 3" descr="image.png"/>
+          <p:cNvPr id="13" name="Picture 12" descr="image.png"/>
           <p:cNvPicPr>
             <a:picLocks noChangeAspect="1"/>
           </p:cNvPicPr>
@@ -3684,17 +4213,41 @@
         </p:blipFill>
         <p:spPr>
           <a:xfrm>
-            <a:off x="838200" y="11582400"/>
-            <a:ext cx="438150" cy="438150"/>
+            <a:off x="674515" y="1954124"/>
+            <a:ext cx="4632668" cy="8769525"/>
           </a:xfrm>
           <a:prstGeom prst="rect">
             <a:avLst/>
           </a:prstGeom>
         </p:spPr>
       </p:pic>
-      <p:sp>
-        <p:nvSpPr>
-          <p:cNvPr id="5" name="TextBox 4"/>
+      <p:pic>
+        <p:nvPicPr>
+          <p:cNvPr id="14" name="Picture 13" descr="image.png"/>
+          <p:cNvPicPr>
+            <a:picLocks noChangeAspect="1"/>
+          </p:cNvPicPr>
+          <p:nvPr/>
+        </p:nvPicPr>
+        <p:blipFill>
+          <a:blip r:embed="rId3"/>
+          <a:stretch>
+            <a:fillRect/>
+          </a:stretch>
+        </p:blipFill>
+        <p:spPr>
+          <a:xfrm>
+            <a:off x="838200" y="11582400"/>
+            <a:ext cx="438150" cy="438150"/>
+          </a:xfrm>
+          <a:prstGeom prst="rect">
+            <a:avLst/>
+          </a:prstGeom>
+        </p:spPr>
+      </p:pic>
+      <p:sp>
+        <p:nvSpPr>
+          <p:cNvPr id="15" name="TextBox 14"/>
           <p:cNvSpPr txBox="1"/>
           <p:nvPr/>
         </p:nvSpPr>

--- a/contenido/carruseles/04-danibox/editable-canva.pptx
+++ b/contenido/carruseles/04-danibox/editable-canva.pptx
@@ -3101,7 +3101,7 @@
       <p:grpSpPr/>
       <p:pic>
         <p:nvPicPr>
-          <p:cNvPr id="2" name="Picture 1" descr="image.png"/>
+          <p:cNvPr id="2" name="Picture 1" descr="image.jpg"/>
           <p:cNvPicPr>
             <a:picLocks noChangeAspect="1"/>
           </p:cNvPicPr>
@@ -3115,8 +3115,8 @@
         </p:blipFill>
         <p:spPr>
           <a:xfrm>
-            <a:off x="-838200" y="-838200"/>
-            <a:ext cx="11963400" cy="14535150"/>
+            <a:off x="0" y="0"/>
+            <a:ext cx="10287000" cy="12858750"/>
           </a:xfrm>
           <a:prstGeom prst="rect">
             <a:avLst/>
